--- a/materialien/Akte5_Bauplan/1_Praesentation/DD_A5_Bauplan.pptx
+++ b/materialien/Akte5_Bauplan/1_Praesentation/DD_A5_Bauplan.pptx
@@ -29243,7 +29243,7 @@
                 </a:solidFill>
                 <a:latin typeface="Barlow"/>
               </a:rPr>
-              <a:t>Überführen</a:t>
+              <a:t>Erstellen</a:t>
             </a:r>
             <a:r>
               <a:rPr sz="2000" b="0" i="0" u="none">
@@ -29252,7 +29252,7 @@
                 </a:solidFill>
                 <a:latin typeface="Barlow"/>
               </a:rPr>
-              <a:t> Sie das Modell in ein Relationenschema in Kurzschreibweise und </a:t>
+              <a:t> Sie zu dem Modell das Relationenschema in Kurzschreibweise und </a:t>
             </a:r>
             <a:r>
               <a:rPr sz="2000" b="1" i="0" u="none">
